--- a/SITE-TO-SITE VPN (TROUBLESHOOT).pptx
+++ b/SITE-TO-SITE VPN (TROUBLESHOOT).pptx
@@ -10,12 +10,14 @@
     <p:sldId id="265" r:id="rId4"/>
     <p:sldId id="263" r:id="rId5"/>
     <p:sldId id="267" r:id="rId6"/>
-    <p:sldId id="256" r:id="rId7"/>
-    <p:sldId id="261" r:id="rId8"/>
-    <p:sldId id="259" r:id="rId9"/>
-    <p:sldId id="262" r:id="rId10"/>
-    <p:sldId id="258" r:id="rId11"/>
-    <p:sldId id="257" r:id="rId12"/>
+    <p:sldId id="269" r:id="rId7"/>
+    <p:sldId id="256" r:id="rId8"/>
+    <p:sldId id="261" r:id="rId9"/>
+    <p:sldId id="259" r:id="rId10"/>
+    <p:sldId id="262" r:id="rId11"/>
+    <p:sldId id="258" r:id="rId12"/>
+    <p:sldId id="257" r:id="rId13"/>
+    <p:sldId id="271" r:id="rId14"/>
   </p:sldIdLst>
   <p:sldSz cx="7199313" cy="10799763"/>
   <p:notesSz cx="9144000" cy="6858000"/>
@@ -117,7 +119,7 @@
   <p:extLst>
     <p:ext uri="{EFAFB233-063F-42B5-8137-9DF3F51BA10A}">
       <p15:sldGuideLst xmlns:p15="http://schemas.microsoft.com/office/powerpoint/2012/main">
-        <p15:guide id="1" orient="horz" pos="3424" userDrawn="1">
+        <p15:guide id="1" orient="horz" pos="3447" userDrawn="1">
           <p15:clr>
             <a:srgbClr val="A4A3A4"/>
           </p15:clr>
@@ -264,7 +266,7 @@
           <a:p>
             <a:fld id="{B9D6400E-9ADF-42A6-9AD6-1E7CB7AE2E1B}" type="datetimeFigureOut">
               <a:rPr lang="en-IN" smtClean="0"/>
-              <a:t>28-08-2025</a:t>
+              <a:t>29-08-2025</a:t>
             </a:fld>
             <a:endParaRPr lang="en-IN"/>
           </a:p>
@@ -434,7 +436,7 @@
           <a:p>
             <a:fld id="{B9D6400E-9ADF-42A6-9AD6-1E7CB7AE2E1B}" type="datetimeFigureOut">
               <a:rPr lang="en-IN" smtClean="0"/>
-              <a:t>28-08-2025</a:t>
+              <a:t>29-08-2025</a:t>
             </a:fld>
             <a:endParaRPr lang="en-IN"/>
           </a:p>
@@ -614,7 +616,7 @@
           <a:p>
             <a:fld id="{B9D6400E-9ADF-42A6-9AD6-1E7CB7AE2E1B}" type="datetimeFigureOut">
               <a:rPr lang="en-IN" smtClean="0"/>
-              <a:t>28-08-2025</a:t>
+              <a:t>29-08-2025</a:t>
             </a:fld>
             <a:endParaRPr lang="en-IN"/>
           </a:p>
@@ -784,7 +786,7 @@
           <a:p>
             <a:fld id="{B9D6400E-9ADF-42A6-9AD6-1E7CB7AE2E1B}" type="datetimeFigureOut">
               <a:rPr lang="en-IN" smtClean="0"/>
-              <a:t>28-08-2025</a:t>
+              <a:t>29-08-2025</a:t>
             </a:fld>
             <a:endParaRPr lang="en-IN"/>
           </a:p>
@@ -842,6 +844,22 @@
   <p:clrMapOvr>
     <a:masterClrMapping/>
   </p:clrMapOvr>
+  <p:extLst>
+    <p:ext uri="{DCECCB84-F9BA-43D5-87BE-67443E8EF086}">
+      <p15:sldGuideLst xmlns:p15="http://schemas.microsoft.com/office/powerpoint/2012/main">
+        <p15:guide id="1" orient="horz" pos="3401" userDrawn="1">
+          <p15:clr>
+            <a:srgbClr val="FBAE40"/>
+          </p15:clr>
+        </p15:guide>
+        <p15:guide id="2" pos="2267" userDrawn="1">
+          <p15:clr>
+            <a:srgbClr val="FBAE40"/>
+          </p15:clr>
+        </p15:guide>
+      </p15:sldGuideLst>
+    </p:ext>
+  </p:extLst>
 </p:sldLayout>
 </file>
 
@@ -1028,7 +1046,7 @@
           <a:p>
             <a:fld id="{B9D6400E-9ADF-42A6-9AD6-1E7CB7AE2E1B}" type="datetimeFigureOut">
               <a:rPr lang="en-IN" smtClean="0"/>
-              <a:t>28-08-2025</a:t>
+              <a:t>29-08-2025</a:t>
             </a:fld>
             <a:endParaRPr lang="en-IN"/>
           </a:p>
@@ -1260,7 +1278,7 @@
           <a:p>
             <a:fld id="{B9D6400E-9ADF-42A6-9AD6-1E7CB7AE2E1B}" type="datetimeFigureOut">
               <a:rPr lang="en-IN" smtClean="0"/>
-              <a:t>28-08-2025</a:t>
+              <a:t>29-08-2025</a:t>
             </a:fld>
             <a:endParaRPr lang="en-IN"/>
           </a:p>
@@ -1627,7 +1645,7 @@
           <a:p>
             <a:fld id="{B9D6400E-9ADF-42A6-9AD6-1E7CB7AE2E1B}" type="datetimeFigureOut">
               <a:rPr lang="en-IN" smtClean="0"/>
-              <a:t>28-08-2025</a:t>
+              <a:t>29-08-2025</a:t>
             </a:fld>
             <a:endParaRPr lang="en-IN"/>
           </a:p>
@@ -1745,7 +1763,7 @@
           <a:p>
             <a:fld id="{B9D6400E-9ADF-42A6-9AD6-1E7CB7AE2E1B}" type="datetimeFigureOut">
               <a:rPr lang="en-IN" smtClean="0"/>
-              <a:t>28-08-2025</a:t>
+              <a:t>29-08-2025</a:t>
             </a:fld>
             <a:endParaRPr lang="en-IN"/>
           </a:p>
@@ -1840,7 +1858,7 @@
           <a:p>
             <a:fld id="{B9D6400E-9ADF-42A6-9AD6-1E7CB7AE2E1B}" type="datetimeFigureOut">
               <a:rPr lang="en-IN" smtClean="0"/>
-              <a:t>28-08-2025</a:t>
+              <a:t>29-08-2025</a:t>
             </a:fld>
             <a:endParaRPr lang="en-IN"/>
           </a:p>
@@ -2117,7 +2135,7 @@
           <a:p>
             <a:fld id="{B9D6400E-9ADF-42A6-9AD6-1E7CB7AE2E1B}" type="datetimeFigureOut">
               <a:rPr lang="en-IN" smtClean="0"/>
-              <a:t>28-08-2025</a:t>
+              <a:t>29-08-2025</a:t>
             </a:fld>
             <a:endParaRPr lang="en-IN"/>
           </a:p>
@@ -2374,7 +2392,7 @@
           <a:p>
             <a:fld id="{B9D6400E-9ADF-42A6-9AD6-1E7CB7AE2E1B}" type="datetimeFigureOut">
               <a:rPr lang="en-IN" smtClean="0"/>
-              <a:t>28-08-2025</a:t>
+              <a:t>29-08-2025</a:t>
             </a:fld>
             <a:endParaRPr lang="en-IN"/>
           </a:p>
@@ -2587,7 +2605,7 @@
           <a:p>
             <a:fld id="{B9D6400E-9ADF-42A6-9AD6-1E7CB7AE2E1B}" type="datetimeFigureOut">
               <a:rPr lang="en-IN" smtClean="0"/>
-              <a:t>28-08-2025</a:t>
+              <a:t>29-08-2025</a:t>
             </a:fld>
             <a:endParaRPr lang="en-IN"/>
           </a:p>
@@ -3138,7 +3156,7 @@
           <a:p>
             <a:r>
               <a:rPr lang="en-US" dirty="0"/>
-              <a:t>Checkpoint:                                     ASA:</a:t>
+              <a:t>Checkpoint:                              ASA:                                     Router:</a:t>
             </a:r>
             <a:br>
               <a:rPr lang="en-US" dirty="0"/>
@@ -3157,7 +3175,7 @@
             </a:r>
             <a:r>
               <a:rPr lang="en-US" dirty="0"/>
-              <a:t>                                        </a:t>
+              <a:t>                                </a:t>
             </a:r>
             <a:r>
               <a:rPr lang="en-US" u="sng" dirty="0"/>
@@ -3171,19 +3189,35 @@
               <a:rPr lang="en-US" u="sng" dirty="0"/>
               <a:t>IP</a:t>
             </a:r>
+            <a:r>
+              <a:rPr lang="en-US" dirty="0"/>
+              <a:t>                           </a:t>
+            </a:r>
+            <a:r>
+              <a:rPr lang="en-US" u="sng" dirty="0"/>
+              <a:t>INT</a:t>
+            </a:r>
+            <a:r>
+              <a:rPr lang="en-US" dirty="0"/>
+              <a:t>   -     </a:t>
+            </a:r>
+            <a:r>
+              <a:rPr lang="en-US" u="sng" dirty="0"/>
+              <a:t>IP</a:t>
+            </a:r>
             <a:br>
               <a:rPr lang="en-US" dirty="0"/>
             </a:br>
             <a:r>
               <a:rPr lang="en-US" dirty="0"/>
-              <a:t>LAN    -   192.168.11.254                INSIDE  -  172.16.22.9</a:t>
+              <a:t>LAN    -   192.168.11.254        INSIDE  -  172.16.22.9       g0/1   -    172.16.55.5</a:t>
             </a:r>
             <a:br>
               <a:rPr lang="en-US" dirty="0"/>
             </a:br>
             <a:r>
               <a:rPr lang="en-US" dirty="0"/>
-              <a:t>WAN  -   100.1.1.1                           OUTSIDE -  100.1.1.9</a:t>
+              <a:t>WAN  -   100.1.1.1                   OUTSIDE -  100.1.1.9         g0/0   -    100.1.1.5</a:t>
             </a:r>
           </a:p>
           <a:p>
@@ -3233,10 +3267,10 @@
       </p:sp>
       <p:pic>
         <p:nvPicPr>
-          <p:cNvPr id="8" name="Picture 7">
+          <p:cNvPr id="5" name="Picture 4">
             <a:extLst>
               <a:ext uri="{FF2B5EF4-FFF2-40B4-BE49-F238E27FC236}">
-                <a16:creationId xmlns:a16="http://schemas.microsoft.com/office/drawing/2014/main" id="{F8C4EF59-5885-0E08-097E-546C9A8922EB}"/>
+                <a16:creationId xmlns:a16="http://schemas.microsoft.com/office/drawing/2014/main" id="{DFE05CAE-6518-6AD9-7F46-D766EF88D37B}"/>
               </a:ext>
             </a:extLst>
           </p:cNvPr>
@@ -3253,8 +3287,8 @@
         </p:blipFill>
         <p:spPr>
           <a:xfrm>
-            <a:off x="-793" y="707506"/>
-            <a:ext cx="7199313" cy="4343624"/>
+            <a:off x="-793" y="677839"/>
+            <a:ext cx="7199313" cy="4364084"/>
           </a:xfrm>
           <a:prstGeom prst="rect">
             <a:avLst/>
@@ -3282,6 +3316,346 @@
         <p:cNvPr id="1" name="">
           <a:extLst>
             <a:ext uri="{FF2B5EF4-FFF2-40B4-BE49-F238E27FC236}">
+              <a16:creationId xmlns:a16="http://schemas.microsoft.com/office/drawing/2014/main" id="{93639A97-2A5C-829A-8640-2C228062B7ED}"/>
+            </a:ext>
+          </a:extLst>
+        </p:cNvPr>
+        <p:cNvGrpSpPr/>
+        <p:nvPr/>
+      </p:nvGrpSpPr>
+      <p:grpSpPr>
+        <a:xfrm>
+          <a:off x="0" y="0"/>
+          <a:ext cx="0" cy="0"/>
+          <a:chOff x="0" y="0"/>
+          <a:chExt cx="0" cy="0"/>
+        </a:xfrm>
+      </p:grpSpPr>
+      <p:sp>
+        <p:nvSpPr>
+          <p:cNvPr id="2" name="Title 1">
+            <a:extLst>
+              <a:ext uri="{FF2B5EF4-FFF2-40B4-BE49-F238E27FC236}">
+                <a16:creationId xmlns:a16="http://schemas.microsoft.com/office/drawing/2014/main" id="{5475AC1A-5435-8715-558C-7037F123B49F}"/>
+              </a:ext>
+            </a:extLst>
+          </p:cNvPr>
+          <p:cNvSpPr>
+            <a:spLocks noGrp="1"/>
+          </p:cNvSpPr>
+          <p:nvPr>
+            <p:ph type="ctrTitle"/>
+          </p:nvPr>
+        </p:nvSpPr>
+        <p:spPr>
+          <a:xfrm>
+            <a:off x="-1" y="0"/>
+            <a:ext cx="7199313" cy="507978"/>
+          </a:xfrm>
+          <a:solidFill>
+            <a:schemeClr val="accent1"/>
+          </a:solidFill>
+        </p:spPr>
+        <p:txBody>
+          <a:bodyPr>
+            <a:noAutofit/>
+          </a:bodyPr>
+          <a:lstStyle/>
+          <a:p>
+            <a:r>
+              <a:rPr lang="en-US" sz="2400" b="1" dirty="0">
+                <a:solidFill>
+                  <a:schemeClr val="bg1"/>
+                </a:solidFill>
+              </a:rPr>
+              <a:t>SITE-TO-SITE VPN (TROUBLESHOOT) On ASA</a:t>
+            </a:r>
+            <a:endParaRPr lang="en-IN" sz="2400" b="1" dirty="0">
+              <a:solidFill>
+                <a:schemeClr val="bg1"/>
+              </a:solidFill>
+            </a:endParaRPr>
+          </a:p>
+        </p:txBody>
+      </p:sp>
+      <p:sp>
+        <p:nvSpPr>
+          <p:cNvPr id="3" name="Subtitle 2">
+            <a:extLst>
+              <a:ext uri="{FF2B5EF4-FFF2-40B4-BE49-F238E27FC236}">
+                <a16:creationId xmlns:a16="http://schemas.microsoft.com/office/drawing/2014/main" id="{75F8F4AF-69AF-4AA9-ED71-2C3CAE6AC3B1}"/>
+              </a:ext>
+            </a:extLst>
+          </p:cNvPr>
+          <p:cNvSpPr>
+            <a:spLocks noGrp="1"/>
+          </p:cNvSpPr>
+          <p:nvPr>
+            <p:ph type="subTitle" idx="1"/>
+          </p:nvPr>
+        </p:nvSpPr>
+        <p:spPr>
+          <a:xfrm>
+            <a:off x="-1" y="589453"/>
+            <a:ext cx="7199313" cy="10210309"/>
+          </a:xfrm>
+        </p:spPr>
+        <p:txBody>
+          <a:bodyPr>
+            <a:normAutofit/>
+          </a:bodyPr>
+          <a:lstStyle/>
+          <a:p>
+            <a:pPr algn="l"/>
+            <a:r>
+              <a:rPr lang="en-US" dirty="0"/>
+              <a:t>4. Both phases success: </a:t>
+            </a:r>
+            <a:br>
+              <a:rPr lang="en-US" dirty="0"/>
+            </a:br>
+            <a:r>
+              <a:rPr lang="en-US" dirty="0"/>
+              <a:t>  </a:t>
+            </a:r>
+          </a:p>
+          <a:p>
+            <a:pPr algn="l"/>
+            <a:endParaRPr lang="en-US" dirty="0"/>
+          </a:p>
+          <a:p>
+            <a:pPr algn="l"/>
+            <a:endParaRPr lang="en-US" dirty="0"/>
+          </a:p>
+          <a:p>
+            <a:pPr algn="l"/>
+            <a:endParaRPr lang="en-US" dirty="0"/>
+          </a:p>
+          <a:p>
+            <a:pPr algn="l"/>
+            <a:endParaRPr lang="en-US" dirty="0"/>
+          </a:p>
+          <a:p>
+            <a:pPr algn="l"/>
+            <a:endParaRPr lang="en-US" dirty="0"/>
+          </a:p>
+          <a:p>
+            <a:pPr algn="l"/>
+            <a:endParaRPr lang="en-US" dirty="0"/>
+          </a:p>
+          <a:p>
+            <a:pPr algn="l"/>
+            <a:endParaRPr lang="en-US" dirty="0"/>
+          </a:p>
+          <a:p>
+            <a:pPr algn="l"/>
+            <a:endParaRPr lang="en-US" dirty="0"/>
+          </a:p>
+          <a:p>
+            <a:pPr algn="l"/>
+            <a:endParaRPr lang="en-US" dirty="0"/>
+          </a:p>
+          <a:p>
+            <a:pPr algn="l"/>
+            <a:endParaRPr lang="en-US" dirty="0"/>
+          </a:p>
+          <a:p>
+            <a:pPr algn="l"/>
+            <a:endParaRPr lang="en-US" dirty="0"/>
+          </a:p>
+          <a:p>
+            <a:pPr algn="l"/>
+            <a:endParaRPr lang="en-US" dirty="0"/>
+          </a:p>
+          <a:p>
+            <a:pPr algn="l"/>
+            <a:endParaRPr lang="en-US" dirty="0"/>
+          </a:p>
+          <a:p>
+            <a:pPr algn="l"/>
+            <a:endParaRPr lang="en-US" dirty="0"/>
+          </a:p>
+          <a:p>
+            <a:pPr algn="l"/>
+            <a:endParaRPr lang="en-US" dirty="0"/>
+          </a:p>
+          <a:p>
+            <a:pPr algn="l"/>
+            <a:endParaRPr lang="en-US" dirty="0"/>
+          </a:p>
+          <a:p>
+            <a:pPr algn="l"/>
+            <a:endParaRPr lang="en-US" dirty="0"/>
+          </a:p>
+          <a:p>
+            <a:pPr algn="l"/>
+            <a:endParaRPr lang="en-US" dirty="0"/>
+          </a:p>
+          <a:p>
+            <a:pPr algn="l"/>
+            <a:endParaRPr lang="en-US" dirty="0"/>
+          </a:p>
+          <a:p>
+            <a:pPr algn="l"/>
+            <a:r>
+              <a:rPr lang="en-US" dirty="0"/>
+              <a:t>    </a:t>
+            </a:r>
+            <a:br>
+              <a:rPr lang="en-US" dirty="0"/>
+            </a:br>
+            <a:r>
+              <a:rPr lang="en-US" dirty="0"/>
+              <a:t>      </a:t>
+            </a:r>
+          </a:p>
+          <a:p>
+            <a:pPr algn="l"/>
+            <a:endParaRPr lang="en-US" dirty="0"/>
+          </a:p>
+          <a:p>
+            <a:pPr algn="l"/>
+            <a:br>
+              <a:rPr lang="en-US" dirty="0"/>
+            </a:br>
+            <a:br>
+              <a:rPr lang="en-US" dirty="0"/>
+            </a:br>
+            <a:endParaRPr lang="en-US" dirty="0"/>
+          </a:p>
+          <a:p>
+            <a:pPr algn="l"/>
+            <a:endParaRPr lang="en-US" dirty="0"/>
+          </a:p>
+          <a:p>
+            <a:pPr algn="l"/>
+            <a:endParaRPr lang="en-US" dirty="0"/>
+          </a:p>
+          <a:p>
+            <a:pPr algn="l"/>
+            <a:endParaRPr lang="en-US" dirty="0"/>
+          </a:p>
+          <a:p>
+            <a:pPr algn="l"/>
+            <a:endParaRPr lang="en-US" dirty="0"/>
+          </a:p>
+          <a:p>
+            <a:pPr algn="l"/>
+            <a:endParaRPr lang="en-US" dirty="0"/>
+          </a:p>
+        </p:txBody>
+      </p:sp>
+      <p:pic>
+        <p:nvPicPr>
+          <p:cNvPr id="10" name="Picture 9">
+            <a:extLst>
+              <a:ext uri="{FF2B5EF4-FFF2-40B4-BE49-F238E27FC236}">
+                <a16:creationId xmlns:a16="http://schemas.microsoft.com/office/drawing/2014/main" id="{EB4B197A-9A68-3396-E0C3-F2E3AB05E480}"/>
+              </a:ext>
+            </a:extLst>
+          </p:cNvPr>
+          <p:cNvPicPr>
+            <a:picLocks noChangeAspect="1"/>
+          </p:cNvPicPr>
+          <p:nvPr/>
+        </p:nvPicPr>
+        <p:blipFill>
+          <a:blip r:embed="rId2"/>
+          <a:stretch>
+            <a:fillRect/>
+          </a:stretch>
+        </p:blipFill>
+        <p:spPr>
+          <a:xfrm>
+            <a:off x="308324" y="907082"/>
+            <a:ext cx="6584251" cy="1786283"/>
+          </a:xfrm>
+          <a:prstGeom prst="rect">
+            <a:avLst/>
+          </a:prstGeom>
+        </p:spPr>
+      </p:pic>
+      <p:pic>
+        <p:nvPicPr>
+          <p:cNvPr id="12" name="Picture 11">
+            <a:extLst>
+              <a:ext uri="{FF2B5EF4-FFF2-40B4-BE49-F238E27FC236}">
+                <a16:creationId xmlns:a16="http://schemas.microsoft.com/office/drawing/2014/main" id="{5587C10D-10BD-4AEB-D187-86CC2F55FAE9}"/>
+              </a:ext>
+            </a:extLst>
+          </p:cNvPr>
+          <p:cNvPicPr>
+            <a:picLocks noChangeAspect="1"/>
+          </p:cNvPicPr>
+          <p:nvPr/>
+        </p:nvPicPr>
+        <p:blipFill>
+          <a:blip r:embed="rId3"/>
+          <a:stretch>
+            <a:fillRect/>
+          </a:stretch>
+        </p:blipFill>
+        <p:spPr>
+          <a:xfrm>
+            <a:off x="308324" y="3424616"/>
+            <a:ext cx="6584251" cy="4461546"/>
+          </a:xfrm>
+          <a:prstGeom prst="rect">
+            <a:avLst/>
+          </a:prstGeom>
+        </p:spPr>
+      </p:pic>
+      <p:pic>
+        <p:nvPicPr>
+          <p:cNvPr id="14" name="Picture 13">
+            <a:extLst>
+              <a:ext uri="{FF2B5EF4-FFF2-40B4-BE49-F238E27FC236}">
+                <a16:creationId xmlns:a16="http://schemas.microsoft.com/office/drawing/2014/main" id="{5F48BF98-00E7-7EA8-73AD-92ED8B58C611}"/>
+              </a:ext>
+            </a:extLst>
+          </p:cNvPr>
+          <p:cNvPicPr>
+            <a:picLocks noChangeAspect="1"/>
+          </p:cNvPicPr>
+          <p:nvPr/>
+        </p:nvPicPr>
+        <p:blipFill>
+          <a:blip r:embed="rId4"/>
+          <a:stretch>
+            <a:fillRect/>
+          </a:stretch>
+        </p:blipFill>
+        <p:spPr>
+          <a:xfrm>
+            <a:off x="306738" y="2827191"/>
+            <a:ext cx="6584251" cy="597425"/>
+          </a:xfrm>
+          <a:prstGeom prst="rect">
+            <a:avLst/>
+          </a:prstGeom>
+        </p:spPr>
+      </p:pic>
+    </p:spTree>
+    <p:extLst>
+      <p:ext uri="{BB962C8B-B14F-4D97-AF65-F5344CB8AC3E}">
+        <p14:creationId xmlns:p14="http://schemas.microsoft.com/office/powerpoint/2010/main" val="2007425565"/>
+      </p:ext>
+    </p:extLst>
+  </p:cSld>
+  <p:clrMapOvr>
+    <a:masterClrMapping/>
+  </p:clrMapOvr>
+</p:sld>
+</file>
+
+<file path=ppt/slides/slide11.xml><?xml version="1.0" encoding="utf-8"?>
+<p:sld xmlns:a="http://schemas.openxmlformats.org/drawingml/2006/main" xmlns:r="http://schemas.openxmlformats.org/officeDocument/2006/relationships" xmlns:p="http://schemas.openxmlformats.org/presentationml/2006/main">
+  <p:cSld>
+    <p:spTree>
+      <p:nvGrpSpPr>
+        <p:cNvPr id="1" name="">
+          <a:extLst>
+            <a:ext uri="{FF2B5EF4-FFF2-40B4-BE49-F238E27FC236}">
               <a16:creationId xmlns:a16="http://schemas.microsoft.com/office/drawing/2014/main" id="{81F86EC2-B582-C93E-D624-15883187BB1B}"/>
             </a:ext>
           </a:extLst>
@@ -3409,6 +3783,25 @@
             <a:pPr algn="l"/>
             <a:r>
               <a:rPr lang="en-US" dirty="0"/>
+              <a:t>2.  If No crypto ACL on remote device only single message appears</a:t>
+            </a:r>
+          </a:p>
+          <a:p>
+            <a:pPr algn="l"/>
+            <a:endParaRPr lang="en-US" dirty="0"/>
+          </a:p>
+          <a:p>
+            <a:pPr algn="l"/>
+            <a:endParaRPr lang="en-US" dirty="0"/>
+          </a:p>
+          <a:p>
+            <a:pPr algn="l"/>
+            <a:endParaRPr lang="en-US" dirty="0"/>
+          </a:p>
+          <a:p>
+            <a:pPr algn="l"/>
+            <a:r>
+              <a:rPr lang="en-US" dirty="0"/>
               <a:t>2. MM_KEY_EXCH:</a:t>
             </a:r>
             <a:br>
@@ -3421,25 +3814,21 @@
           </a:p>
           <a:p>
             <a:pPr algn="l"/>
-            <a:endParaRPr lang="en-US" dirty="0"/>
-          </a:p>
-          <a:p>
-            <a:pPr algn="l"/>
-            <a:endParaRPr lang="en-US" dirty="0"/>
-          </a:p>
-          <a:p>
-            <a:pPr algn="l"/>
-            <a:endParaRPr lang="en-US" dirty="0"/>
-          </a:p>
-          <a:p>
-            <a:pPr algn="l"/>
-            <a:endParaRPr lang="en-US" dirty="0"/>
-          </a:p>
-          <a:p>
-            <a:pPr algn="l"/>
             <a:br>
               <a:rPr lang="en-US" dirty="0"/>
             </a:br>
+            <a:endParaRPr lang="en-US" dirty="0"/>
+          </a:p>
+          <a:p>
+            <a:pPr algn="l"/>
+            <a:endParaRPr lang="en-US" dirty="0"/>
+          </a:p>
+          <a:p>
+            <a:pPr algn="l"/>
+            <a:endParaRPr lang="en-US" dirty="0"/>
+          </a:p>
+          <a:p>
+            <a:pPr algn="l"/>
             <a:br>
               <a:rPr lang="en-US" dirty="0"/>
             </a:br>
@@ -3515,7 +3904,7 @@
         </p:blipFill>
         <p:spPr>
           <a:xfrm>
-            <a:off x="328464" y="4794496"/>
+            <a:off x="328463" y="6076904"/>
             <a:ext cx="6641567" cy="501767"/>
           </a:xfrm>
           <a:prstGeom prst="rect">
@@ -3545,38 +3934,8 @@
         </p:blipFill>
         <p:spPr>
           <a:xfrm>
-            <a:off x="214117" y="2079350"/>
+            <a:off x="288505" y="2185996"/>
             <a:ext cx="6646858" cy="581601"/>
-          </a:xfrm>
-          <a:prstGeom prst="rect">
-            <a:avLst/>
-          </a:prstGeom>
-        </p:spPr>
-      </p:pic>
-      <p:pic>
-        <p:nvPicPr>
-          <p:cNvPr id="13" name="Picture 12">
-            <a:extLst>
-              <a:ext uri="{FF2B5EF4-FFF2-40B4-BE49-F238E27FC236}">
-                <a16:creationId xmlns:a16="http://schemas.microsoft.com/office/drawing/2014/main" id="{87595688-D2CB-F7C6-2B1E-EC563C9A31F5}"/>
-              </a:ext>
-            </a:extLst>
-          </p:cNvPr>
-          <p:cNvPicPr>
-            <a:picLocks noChangeAspect="1"/>
-          </p:cNvPicPr>
-          <p:nvPr/>
-        </p:nvPicPr>
-        <p:blipFill>
-          <a:blip r:embed="rId4"/>
-          <a:stretch>
-            <a:fillRect/>
-          </a:stretch>
-        </p:blipFill>
-        <p:spPr>
-          <a:xfrm>
-            <a:off x="214117" y="1214509"/>
-            <a:ext cx="6695023" cy="762725"/>
           </a:xfrm>
           <a:prstGeom prst="rect">
             <a:avLst/>
@@ -3598,14 +3957,14 @@
           <p:nvPr/>
         </p:nvPicPr>
         <p:blipFill>
-          <a:blip r:embed="rId5"/>
+          <a:blip r:embed="rId4"/>
           <a:stretch>
             <a:fillRect/>
           </a:stretch>
         </p:blipFill>
         <p:spPr>
           <a:xfrm>
-            <a:off x="389357" y="3658267"/>
+            <a:off x="389354" y="5045270"/>
             <a:ext cx="6519783" cy="950158"/>
           </a:xfrm>
           <a:prstGeom prst="rect">
@@ -3628,14 +3987,14 @@
           <p:nvPr/>
         </p:nvPicPr>
         <p:blipFill>
-          <a:blip r:embed="rId6"/>
+          <a:blip r:embed="rId5"/>
           <a:stretch>
             <a:fillRect/>
           </a:stretch>
         </p:blipFill>
         <p:spPr>
           <a:xfrm>
-            <a:off x="171842" y="7425687"/>
+            <a:off x="228376" y="8536489"/>
             <a:ext cx="6841742" cy="1961300"/>
           </a:xfrm>
           <a:prstGeom prst="rect">
@@ -3658,6 +4017,36 @@
           <p:nvPr/>
         </p:nvPicPr>
         <p:blipFill>
+          <a:blip r:embed="rId6"/>
+          <a:stretch>
+            <a:fillRect/>
+          </a:stretch>
+        </p:blipFill>
+        <p:spPr>
+          <a:xfrm>
+            <a:off x="331393" y="7173996"/>
+            <a:ext cx="6536524" cy="858170"/>
+          </a:xfrm>
+          <a:prstGeom prst="rect">
+            <a:avLst/>
+          </a:prstGeom>
+        </p:spPr>
+      </p:pic>
+      <p:pic>
+        <p:nvPicPr>
+          <p:cNvPr id="14" name="Picture 13">
+            <a:extLst>
+              <a:ext uri="{FF2B5EF4-FFF2-40B4-BE49-F238E27FC236}">
+                <a16:creationId xmlns:a16="http://schemas.microsoft.com/office/drawing/2014/main" id="{BFD5A656-79E0-0351-3E25-255565A1DA5C}"/>
+              </a:ext>
+            </a:extLst>
+          </p:cNvPr>
+          <p:cNvPicPr>
+            <a:picLocks noChangeAspect="1"/>
+          </p:cNvPicPr>
+          <p:nvPr/>
+        </p:nvPicPr>
+        <p:blipFill>
           <a:blip r:embed="rId7"/>
           <a:stretch>
             <a:fillRect/>
@@ -3665,8 +4054,38 @@
         </p:blipFill>
         <p:spPr>
           <a:xfrm>
-            <a:off x="324451" y="6007823"/>
-            <a:ext cx="6536524" cy="858170"/>
+            <a:off x="288505" y="1295326"/>
+            <a:ext cx="6498899" cy="853514"/>
+          </a:xfrm>
+          <a:prstGeom prst="rect">
+            <a:avLst/>
+          </a:prstGeom>
+        </p:spPr>
+      </p:pic>
+      <p:pic>
+        <p:nvPicPr>
+          <p:cNvPr id="10" name="Picture 9">
+            <a:extLst>
+              <a:ext uri="{FF2B5EF4-FFF2-40B4-BE49-F238E27FC236}">
+                <a16:creationId xmlns:a16="http://schemas.microsoft.com/office/drawing/2014/main" id="{FE47C2AB-A901-9006-DCFE-F434B5015376}"/>
+              </a:ext>
+            </a:extLst>
+          </p:cNvPr>
+          <p:cNvPicPr>
+            <a:picLocks noChangeAspect="1"/>
+          </p:cNvPicPr>
+          <p:nvPr/>
+        </p:nvPicPr>
+        <p:blipFill>
+          <a:blip r:embed="rId8"/>
+          <a:stretch>
+            <a:fillRect/>
+          </a:stretch>
+        </p:blipFill>
+        <p:spPr>
+          <a:xfrm>
+            <a:off x="664193" y="3428277"/>
+            <a:ext cx="5505165" cy="963251"/>
           </a:xfrm>
           <a:prstGeom prst="rect">
             <a:avLst/>
@@ -3686,7 +4105,7 @@
 </p:sld>
 </file>
 
-<file path=ppt/slides/slide11.xml><?xml version="1.0" encoding="utf-8"?>
+<file path=ppt/slides/slide12.xml><?xml version="1.0" encoding="utf-8"?>
 <p:sld xmlns:a="http://schemas.openxmlformats.org/drawingml/2006/main" xmlns:r="http://schemas.openxmlformats.org/officeDocument/2006/relationships" xmlns:p="http://schemas.openxmlformats.org/presentationml/2006/main">
   <p:cSld>
     <p:spTree>
@@ -3731,7 +4150,7 @@
         </p:blipFill>
         <p:spPr>
           <a:xfrm>
-            <a:off x="502351" y="4436232"/>
+            <a:off x="507268" y="4246947"/>
             <a:ext cx="6351314" cy="1790948"/>
           </a:xfrm>
           <a:prstGeom prst="rect">
@@ -3819,13 +4238,66 @@
               <a:rPr lang="en-US" dirty="0"/>
               <a:t>4. Both phases success:</a:t>
             </a:r>
-            <a:br>
-              <a:rPr lang="en-US" dirty="0"/>
-            </a:br>
-            <a:r>
-              <a:rPr lang="en-US" dirty="0"/>
-              <a:t>     </a:t>
-            </a:r>
+          </a:p>
+          <a:p>
+            <a:pPr algn="l"/>
+            <a:endParaRPr lang="en-US" dirty="0"/>
+          </a:p>
+          <a:p>
+            <a:pPr algn="l"/>
+            <a:endParaRPr lang="en-US" dirty="0"/>
+          </a:p>
+          <a:p>
+            <a:pPr algn="l"/>
+            <a:endParaRPr lang="en-US" dirty="0"/>
+          </a:p>
+          <a:p>
+            <a:pPr algn="l"/>
+            <a:endParaRPr lang="en-US" dirty="0"/>
+          </a:p>
+          <a:p>
+            <a:pPr algn="l"/>
+            <a:endParaRPr lang="en-US" dirty="0"/>
+          </a:p>
+          <a:p>
+            <a:pPr algn="l"/>
+            <a:endParaRPr lang="en-US" dirty="0"/>
+          </a:p>
+          <a:p>
+            <a:pPr algn="l"/>
+            <a:endParaRPr lang="en-US" dirty="0"/>
+          </a:p>
+          <a:p>
+            <a:pPr algn="l"/>
+            <a:endParaRPr lang="en-US" dirty="0"/>
+          </a:p>
+          <a:p>
+            <a:pPr algn="l"/>
+            <a:endParaRPr lang="en-US" dirty="0"/>
+          </a:p>
+          <a:p>
+            <a:pPr algn="l"/>
+            <a:endParaRPr lang="en-US" dirty="0"/>
+          </a:p>
+          <a:p>
+            <a:pPr algn="l"/>
+            <a:endParaRPr lang="en-US" dirty="0"/>
+          </a:p>
+          <a:p>
+            <a:pPr algn="l"/>
+            <a:endParaRPr lang="en-US" dirty="0"/>
+          </a:p>
+          <a:p>
+            <a:pPr algn="l"/>
+            <a:endParaRPr lang="en-US" dirty="0"/>
+          </a:p>
+          <a:p>
+            <a:pPr algn="l"/>
+            <a:endParaRPr lang="en-US" dirty="0"/>
+          </a:p>
+          <a:p>
+            <a:pPr algn="l"/>
+            <a:endParaRPr lang="en-US" dirty="0"/>
           </a:p>
         </p:txBody>
       </p:sp>
@@ -3851,7 +4323,7 @@
         </p:blipFill>
         <p:spPr>
           <a:xfrm>
-            <a:off x="535658" y="1382653"/>
+            <a:off x="482684" y="1118493"/>
             <a:ext cx="6235532" cy="991004"/>
           </a:xfrm>
           <a:prstGeom prst="rect">
@@ -3881,7 +4353,7 @@
         </p:blipFill>
         <p:spPr>
           <a:xfrm>
-            <a:off x="502351" y="2560961"/>
+            <a:off x="482684" y="2296801"/>
             <a:ext cx="6268839" cy="1762842"/>
           </a:xfrm>
           <a:prstGeom prst="rect">
@@ -3893,6 +4365,335 @@
     <p:extLst>
       <p:ext uri="{BB962C8B-B14F-4D97-AF65-F5344CB8AC3E}">
         <p14:creationId xmlns:p14="http://schemas.microsoft.com/office/powerpoint/2010/main" val="2185132625"/>
+      </p:ext>
+    </p:extLst>
+  </p:cSld>
+  <p:clrMapOvr>
+    <a:masterClrMapping/>
+  </p:clrMapOvr>
+</p:sld>
+</file>
+
+<file path=ppt/slides/slide13.xml><?xml version="1.0" encoding="utf-8"?>
+<p:sld xmlns:a="http://schemas.openxmlformats.org/drawingml/2006/main" xmlns:r="http://schemas.openxmlformats.org/officeDocument/2006/relationships" xmlns:p="http://schemas.openxmlformats.org/presentationml/2006/main">
+  <p:cSld>
+    <p:spTree>
+      <p:nvGrpSpPr>
+        <p:cNvPr id="1" name="">
+          <a:extLst>
+            <a:ext uri="{FF2B5EF4-FFF2-40B4-BE49-F238E27FC236}">
+              <a16:creationId xmlns:a16="http://schemas.microsoft.com/office/drawing/2014/main" id="{4AF7136F-FF7C-D024-2826-A7200024AB73}"/>
+            </a:ext>
+          </a:extLst>
+        </p:cNvPr>
+        <p:cNvGrpSpPr/>
+        <p:nvPr/>
+      </p:nvGrpSpPr>
+      <p:grpSpPr>
+        <a:xfrm>
+          <a:off x="0" y="0"/>
+          <a:ext cx="0" cy="0"/>
+          <a:chOff x="0" y="0"/>
+          <a:chExt cx="0" cy="0"/>
+        </a:xfrm>
+      </p:grpSpPr>
+      <p:sp>
+        <p:nvSpPr>
+          <p:cNvPr id="2" name="Title 1">
+            <a:extLst>
+              <a:ext uri="{FF2B5EF4-FFF2-40B4-BE49-F238E27FC236}">
+                <a16:creationId xmlns:a16="http://schemas.microsoft.com/office/drawing/2014/main" id="{61CD158B-FA55-BEE6-343F-6FDDD42F3613}"/>
+              </a:ext>
+            </a:extLst>
+          </p:cNvPr>
+          <p:cNvSpPr>
+            <a:spLocks noGrp="1"/>
+          </p:cNvSpPr>
+          <p:nvPr>
+            <p:ph type="ctrTitle"/>
+          </p:nvPr>
+        </p:nvSpPr>
+        <p:spPr>
+          <a:xfrm>
+            <a:off x="-1" y="0"/>
+            <a:ext cx="7199313" cy="507978"/>
+          </a:xfrm>
+          <a:solidFill>
+            <a:schemeClr val="accent1"/>
+          </a:solidFill>
+        </p:spPr>
+        <p:txBody>
+          <a:bodyPr>
+            <a:noAutofit/>
+          </a:bodyPr>
+          <a:lstStyle/>
+          <a:p>
+            <a:r>
+              <a:rPr lang="en-US" sz="2400" b="1" dirty="0">
+                <a:solidFill>
+                  <a:schemeClr val="bg1"/>
+                </a:solidFill>
+              </a:rPr>
+              <a:t>Other possible causes &amp; Solution </a:t>
+            </a:r>
+            <a:endParaRPr lang="en-IN" sz="2400" b="1" dirty="0">
+              <a:solidFill>
+                <a:schemeClr val="bg1"/>
+              </a:solidFill>
+            </a:endParaRPr>
+          </a:p>
+        </p:txBody>
+      </p:sp>
+      <p:sp>
+        <p:nvSpPr>
+          <p:cNvPr id="3" name="Subtitle 2">
+            <a:extLst>
+              <a:ext uri="{FF2B5EF4-FFF2-40B4-BE49-F238E27FC236}">
+                <a16:creationId xmlns:a16="http://schemas.microsoft.com/office/drawing/2014/main" id="{AA019C6A-CECC-F758-50AA-16340445EBCB}"/>
+              </a:ext>
+            </a:extLst>
+          </p:cNvPr>
+          <p:cNvSpPr>
+            <a:spLocks noGrp="1"/>
+          </p:cNvSpPr>
+          <p:nvPr>
+            <p:ph type="subTitle" idx="1"/>
+          </p:nvPr>
+        </p:nvSpPr>
+        <p:spPr>
+          <a:xfrm>
+            <a:off x="-1" y="589454"/>
+            <a:ext cx="7199313" cy="8410085"/>
+          </a:xfrm>
+        </p:spPr>
+        <p:txBody>
+          <a:bodyPr>
+            <a:normAutofit/>
+          </a:bodyPr>
+          <a:lstStyle/>
+          <a:p>
+            <a:pPr algn="l"/>
+            <a:r>
+              <a:rPr lang="en-US" dirty="0"/>
+              <a:t>Configuration need to check or perform:</a:t>
+            </a:r>
+          </a:p>
+          <a:p>
+            <a:pPr marL="182563" indent="-182563" algn="l">
+              <a:buFont typeface="+mj-lt"/>
+              <a:buAutoNum type="romanUcPeriod"/>
+            </a:pPr>
+            <a:r>
+              <a:rPr lang="en-US" dirty="0"/>
+              <a:t> </a:t>
+            </a:r>
+            <a:r>
+              <a:rPr lang="en-IN" dirty="0"/>
+              <a:t>DNS resolution check </a:t>
+            </a:r>
+            <a:endParaRPr lang="en-US" dirty="0"/>
+          </a:p>
+          <a:p>
+            <a:pPr marL="182563" indent="-182563" algn="l">
+              <a:buFont typeface="+mj-lt"/>
+              <a:buAutoNum type="romanUcPeriod"/>
+            </a:pPr>
+            <a:r>
+              <a:rPr lang="en-US" dirty="0"/>
+              <a:t>MTU mismatch &amp; Fragmentation </a:t>
+            </a:r>
+            <a:br>
+              <a:rPr lang="en-US" dirty="0"/>
+            </a:br>
+            <a:r>
+              <a:rPr lang="en-US" dirty="0"/>
+              <a:t>(ping </a:t>
+            </a:r>
+            <a:r>
+              <a:rPr lang="en-US" dirty="0" err="1"/>
+              <a:t>ip</a:t>
+            </a:r>
+            <a:r>
+              <a:rPr lang="en-US" dirty="0"/>
+              <a:t>-address </a:t>
+            </a:r>
+            <a:r>
+              <a:rPr lang="en-US" dirty="0" err="1"/>
+              <a:t>df</a:t>
+            </a:r>
+            <a:r>
+              <a:rPr lang="en-US" dirty="0"/>
+              <a:t>-bit &lt;size&gt;,  </a:t>
+            </a:r>
+            <a:r>
+              <a:rPr lang="en-IN" dirty="0"/>
+              <a:t>show </a:t>
+            </a:r>
+            <a:r>
+              <a:rPr lang="en-IN" dirty="0" err="1"/>
+              <a:t>ip</a:t>
+            </a:r>
+            <a:r>
+              <a:rPr lang="en-IN" dirty="0"/>
+              <a:t> traffic</a:t>
+            </a:r>
+            <a:r>
+              <a:rPr lang="en-US" dirty="0"/>
+              <a:t>)</a:t>
+            </a:r>
+          </a:p>
+          <a:p>
+            <a:pPr marL="263525" indent="-263525" algn="l">
+              <a:buFont typeface="+mj-lt"/>
+              <a:buAutoNum type="romanUcPeriod"/>
+            </a:pPr>
+            <a:r>
+              <a:rPr lang="en-US" dirty="0"/>
+              <a:t>Asymmetric route (check using traceroute)</a:t>
+            </a:r>
+          </a:p>
+          <a:p>
+            <a:pPr marL="182563" indent="-182563" algn="l">
+              <a:buFont typeface="+mj-lt"/>
+              <a:buAutoNum type="romanUcPeriod"/>
+            </a:pPr>
+            <a:r>
+              <a:rPr lang="en-IN" dirty="0"/>
+              <a:t>Device-health or CPU utilisation  </a:t>
+            </a:r>
+            <a:br>
+              <a:rPr lang="en-IN" dirty="0"/>
+            </a:br>
+            <a:r>
+              <a:rPr lang="en-IN" dirty="0"/>
+              <a:t>(show platform resources, show process </a:t>
+            </a:r>
+            <a:r>
+              <a:rPr lang="en-IN" dirty="0" err="1"/>
+              <a:t>cpu</a:t>
+            </a:r>
+            <a:r>
+              <a:rPr lang="en-IN" dirty="0"/>
+              <a:t> sorted)</a:t>
+            </a:r>
+          </a:p>
+          <a:p>
+            <a:pPr marL="182563" indent="-182563" algn="l">
+              <a:buFont typeface="+mj-lt"/>
+              <a:buAutoNum type="romanUcPeriod"/>
+            </a:pPr>
+            <a:r>
+              <a:rPr lang="en-IN" dirty="0"/>
+              <a:t> Perform Quality Of service for TCP or interesting traffic</a:t>
+            </a:r>
+          </a:p>
+          <a:p>
+            <a:pPr marL="182563" indent="-182563" algn="l">
+              <a:buFont typeface="+mj-lt"/>
+              <a:buAutoNum type="romanUcPeriod"/>
+            </a:pPr>
+            <a:r>
+              <a:rPr lang="en-IN" dirty="0"/>
+              <a:t>Firewall Policy </a:t>
+            </a:r>
+            <a:br>
+              <a:rPr lang="en-IN" dirty="0"/>
+            </a:br>
+            <a:r>
+              <a:rPr lang="en-IN" dirty="0"/>
+              <a:t>(use inline and ordered layer policy as it provides hierarchical policy structure)</a:t>
+            </a:r>
+          </a:p>
+          <a:p>
+            <a:pPr marL="182563" indent="-182563" algn="l">
+              <a:buFont typeface="+mj-lt"/>
+              <a:buAutoNum type="romanUcPeriod"/>
+            </a:pPr>
+            <a:r>
+              <a:rPr lang="en-IN" dirty="0"/>
+              <a:t>Use Policy trace (virtual check)</a:t>
+            </a:r>
+          </a:p>
+          <a:p>
+            <a:pPr marL="182563" indent="-182563" algn="l">
+              <a:buFont typeface="+mj-lt"/>
+              <a:buAutoNum type="romanUcPeriod"/>
+            </a:pPr>
+            <a:endParaRPr lang="en-IN" dirty="0"/>
+          </a:p>
+          <a:p>
+            <a:pPr marL="182563" indent="-182563" algn="l">
+              <a:buFont typeface="+mj-lt"/>
+              <a:buAutoNum type="romanUcPeriod"/>
+            </a:pPr>
+            <a:endParaRPr lang="en-US" dirty="0"/>
+          </a:p>
+          <a:p>
+            <a:pPr algn="l"/>
+            <a:endParaRPr lang="en-US" dirty="0"/>
+          </a:p>
+          <a:p>
+            <a:pPr algn="l"/>
+            <a:endParaRPr lang="en-US" dirty="0"/>
+          </a:p>
+          <a:p>
+            <a:pPr algn="l"/>
+            <a:endParaRPr lang="en-US" dirty="0"/>
+          </a:p>
+          <a:p>
+            <a:pPr algn="l"/>
+            <a:endParaRPr lang="en-US" dirty="0"/>
+          </a:p>
+          <a:p>
+            <a:pPr algn="l"/>
+            <a:endParaRPr lang="en-US" dirty="0"/>
+          </a:p>
+          <a:p>
+            <a:pPr algn="l"/>
+            <a:endParaRPr lang="en-US" dirty="0"/>
+          </a:p>
+          <a:p>
+            <a:pPr algn="l"/>
+            <a:endParaRPr lang="en-US" dirty="0"/>
+          </a:p>
+          <a:p>
+            <a:pPr algn="l"/>
+            <a:endParaRPr lang="en-US" dirty="0"/>
+          </a:p>
+          <a:p>
+            <a:pPr algn="l"/>
+            <a:endParaRPr lang="en-US" dirty="0"/>
+          </a:p>
+          <a:p>
+            <a:pPr algn="l"/>
+            <a:endParaRPr lang="en-US" dirty="0"/>
+          </a:p>
+          <a:p>
+            <a:pPr algn="l"/>
+            <a:endParaRPr lang="en-US" dirty="0"/>
+          </a:p>
+          <a:p>
+            <a:pPr algn="l"/>
+            <a:endParaRPr lang="en-US" dirty="0"/>
+          </a:p>
+          <a:p>
+            <a:pPr algn="l"/>
+            <a:endParaRPr lang="en-US" dirty="0"/>
+          </a:p>
+          <a:p>
+            <a:pPr algn="l"/>
+            <a:endParaRPr lang="en-US" dirty="0"/>
+          </a:p>
+          <a:p>
+            <a:pPr algn="l"/>
+            <a:endParaRPr lang="en-US" dirty="0"/>
+          </a:p>
+        </p:txBody>
+      </p:sp>
+    </p:spTree>
+    <p:extLst>
+      <p:ext uri="{BB962C8B-B14F-4D97-AF65-F5344CB8AC3E}">
+        <p14:creationId xmlns:p14="http://schemas.microsoft.com/office/powerpoint/2010/main" val="3590111830"/>
       </p:ext>
     </p:extLst>
   </p:cSld>
@@ -5055,22 +5856,20 @@
       </p:sp>
       <p:sp>
         <p:nvSpPr>
-          <p:cNvPr id="4" name="Title 1">
+          <p:cNvPr id="6" name="TextBox 5">
             <a:extLst>
               <a:ext uri="{FF2B5EF4-FFF2-40B4-BE49-F238E27FC236}">
-                <a16:creationId xmlns:a16="http://schemas.microsoft.com/office/drawing/2014/main" id="{B1781462-7C73-4C15-C385-454711372271}"/>
+                <a16:creationId xmlns:a16="http://schemas.microsoft.com/office/drawing/2014/main" id="{12E25AD1-D3E3-35CC-BB3F-58DC2BF224D7}"/>
               </a:ext>
             </a:extLst>
           </p:cNvPr>
-          <p:cNvSpPr txBox="1">
-            <a:spLocks/>
-          </p:cNvSpPr>
+          <p:cNvSpPr txBox="1"/>
           <p:nvPr/>
         </p:nvSpPr>
         <p:spPr>
           <a:xfrm>
-            <a:off x="793" y="0"/>
-            <a:ext cx="7199313" cy="507978"/>
+            <a:off x="0" y="0"/>
+            <a:ext cx="7199313" cy="646331"/>
           </a:xfrm>
           <a:prstGeom prst="rect">
             <a:avLst/>
@@ -5080,28 +5879,10 @@
           </a:solidFill>
         </p:spPr>
         <p:txBody>
-          <a:bodyPr vert="horz" lIns="91440" tIns="45720" rIns="91440" bIns="45720" rtlCol="0" anchor="ctr">
-            <a:noAutofit/>
+          <a:bodyPr wrap="square" rtlCol="0">
+            <a:spAutoFit/>
           </a:bodyPr>
-          <a:lstStyle>
-            <a:lvl1pPr algn="l" defTabSz="719907" rtl="0" eaLnBrk="1" latinLnBrk="0" hangingPunct="1">
-              <a:lnSpc>
-                <a:spcPct val="90000"/>
-              </a:lnSpc>
-              <a:spcBef>
-                <a:spcPct val="0"/>
-              </a:spcBef>
-              <a:buNone/>
-              <a:defRPr sz="3464" kern="1200">
-                <a:solidFill>
-                  <a:schemeClr val="tx1"/>
-                </a:solidFill>
-                <a:latin typeface="+mj-lt"/>
-                <a:ea typeface="+mj-ea"/>
-                <a:cs typeface="+mj-cs"/>
-              </a:defRPr>
-            </a:lvl1pPr>
-          </a:lstStyle>
+          <a:lstStyle/>
           <a:p>
             <a:pPr algn="ctr"/>
             <a:r>
@@ -5109,13 +5890,15 @@
                 <a:solidFill>
                   <a:schemeClr val="bg1"/>
                 </a:solidFill>
+                <a:latin typeface="Calibri Light (Headings)"/>
               </a:rPr>
-              <a:t>ASA Configuration</a:t>
+              <a:t>ASA COFIGURATION</a:t>
             </a:r>
             <a:endParaRPr lang="en-IN" sz="3600" b="1" dirty="0">
               <a:solidFill>
                 <a:schemeClr val="bg1"/>
               </a:solidFill>
+              <a:latin typeface="Calibri Light (Headings)"/>
             </a:endParaRPr>
           </a:p>
         </p:txBody>
@@ -5390,22 +6173,102 @@
               <a:t>dontFragment</a:t>
             </a:r>
             <a:br>
-              <a:rPr lang="en-US"/>
+              <a:rPr lang="en-US" dirty="0"/>
             </a:br>
             <a:r>
-              <a:rPr lang="en-US"/>
+              <a:rPr lang="en-US" dirty="0"/>
+              <a:t>      deny </a:t>
+            </a:r>
+            <a:r>
+              <a:rPr lang="en-US" dirty="0" err="1"/>
+              <a:t>icmp</a:t>
+            </a:r>
+            <a:r>
+              <a:rPr lang="en-US" dirty="0"/>
+              <a:t> any </a:t>
+            </a:r>
+            <a:r>
+              <a:rPr lang="en-US" dirty="0" err="1"/>
+              <a:t>any</a:t>
+            </a:r>
+            <a:r>
+              <a:rPr lang="en-US" dirty="0"/>
+              <a:t> </a:t>
+            </a:r>
+            <a:r>
+              <a:rPr lang="en-US" dirty="0" err="1"/>
+              <a:t>fragement</a:t>
+            </a:r>
+            <a:br>
+              <a:rPr lang="en-US" dirty="0"/>
+            </a:br>
+            <a:r>
+              <a:rPr lang="en-US" dirty="0"/>
+              <a:t>      permit </a:t>
+            </a:r>
+            <a:r>
+              <a:rPr lang="en-US" dirty="0" err="1"/>
+              <a:t>ip</a:t>
+            </a:r>
+            <a:r>
+              <a:rPr lang="en-US" dirty="0"/>
+              <a:t> any </a:t>
+            </a:r>
+            <a:r>
+              <a:rPr lang="en-US" dirty="0" err="1"/>
+              <a:t>any</a:t>
+            </a:r>
+            <a:br>
+              <a:rPr lang="en-US" dirty="0"/>
+            </a:br>
+            <a:r>
+              <a:rPr lang="en-US" dirty="0"/>
+              <a:t>int g0/0</a:t>
+            </a:r>
+            <a:br>
+              <a:rPr lang="en-US" dirty="0"/>
+            </a:br>
+            <a:r>
+              <a:rPr lang="en-US" dirty="0"/>
               <a:t>      </a:t>
             </a:r>
-            <a:endParaRPr lang="en-US" dirty="0"/>
-          </a:p>
-        </p:txBody>
-      </p:sp>
-      <p:sp>
-        <p:nvSpPr>
-          <p:cNvPr id="4" name="Title 1">
+            <a:r>
+              <a:rPr lang="en-US" dirty="0" err="1"/>
+              <a:t>ip</a:t>
+            </a:r>
+            <a:r>
+              <a:rPr lang="en-US" dirty="0"/>
+              <a:t> access-group </a:t>
+            </a:r>
+            <a:r>
+              <a:rPr lang="en-US" dirty="0" err="1"/>
+              <a:t>dontFragment</a:t>
+            </a:r>
+            <a:r>
+              <a:rPr lang="en-US" dirty="0"/>
+              <a:t> in</a:t>
+            </a:r>
+          </a:p>
+          <a:p>
+            <a:pPr marL="0" indent="0">
+              <a:buNone/>
+            </a:pPr>
+            <a:endParaRPr lang="en-US" dirty="0"/>
+          </a:p>
+          <a:p>
+            <a:pPr marL="0" indent="0">
+              <a:buNone/>
+            </a:pPr>
+            <a:endParaRPr lang="en-US" dirty="0"/>
+          </a:p>
+        </p:txBody>
+      </p:sp>
+      <p:sp>
+        <p:nvSpPr>
+          <p:cNvPr id="5" name="Title 1">
             <a:extLst>
               <a:ext uri="{FF2B5EF4-FFF2-40B4-BE49-F238E27FC236}">
-                <a16:creationId xmlns:a16="http://schemas.microsoft.com/office/drawing/2014/main" id="{75AB04B0-51DD-EC90-0817-333783BF5307}"/>
+                <a16:creationId xmlns:a16="http://schemas.microsoft.com/office/drawing/2014/main" id="{4BACEF73-2499-EABB-CA2F-3AE53ACFBDBA}"/>
               </a:ext>
             </a:extLst>
           </p:cNvPr>
@@ -5416,7 +6279,7 @@
         </p:nvSpPr>
         <p:spPr>
           <a:xfrm>
-            <a:off x="793" y="0"/>
+            <a:off x="-1" y="0"/>
             <a:ext cx="7199313" cy="507978"/>
           </a:xfrm>
           <a:prstGeom prst="rect">
@@ -5467,36 +6330,6 @@
           </a:p>
         </p:txBody>
       </p:sp>
-      <p:pic>
-        <p:nvPicPr>
-          <p:cNvPr id="2" name="Picture 1">
-            <a:extLst>
-              <a:ext uri="{FF2B5EF4-FFF2-40B4-BE49-F238E27FC236}">
-                <a16:creationId xmlns:a16="http://schemas.microsoft.com/office/drawing/2014/main" id="{2126219D-DCCB-979C-4B97-7C0C2A726626}"/>
-              </a:ext>
-            </a:extLst>
-          </p:cNvPr>
-          <p:cNvPicPr>
-            <a:picLocks noChangeAspect="1"/>
-          </p:cNvPicPr>
-          <p:nvPr/>
-        </p:nvPicPr>
-        <p:blipFill>
-          <a:blip r:embed="rId2"/>
-          <a:stretch>
-            <a:fillRect/>
-          </a:stretch>
-        </p:blipFill>
-        <p:spPr>
-          <a:xfrm>
-            <a:off x="280858" y="8154528"/>
-            <a:ext cx="6637595" cy="1958510"/>
-          </a:xfrm>
-          <a:prstGeom prst="rect">
-            <a:avLst/>
-          </a:prstGeom>
-        </p:spPr>
-      </p:pic>
     </p:spTree>
     <p:extLst>
       <p:ext uri="{BB962C8B-B14F-4D97-AF65-F5344CB8AC3E}">
@@ -5515,6 +6348,363 @@
   <p:cSld>
     <p:spTree>
       <p:nvGrpSpPr>
+        <p:cNvPr id="1" name="">
+          <a:extLst>
+            <a:ext uri="{FF2B5EF4-FFF2-40B4-BE49-F238E27FC236}">
+              <a16:creationId xmlns:a16="http://schemas.microsoft.com/office/drawing/2014/main" id="{5E7E0E49-10A2-E2C1-2703-968C2EFA4A30}"/>
+            </a:ext>
+          </a:extLst>
+        </p:cNvPr>
+        <p:cNvGrpSpPr/>
+        <p:nvPr/>
+      </p:nvGrpSpPr>
+      <p:grpSpPr>
+        <a:xfrm>
+          <a:off x="0" y="0"/>
+          <a:ext cx="0" cy="0"/>
+          <a:chOff x="0" y="0"/>
+          <a:chExt cx="0" cy="0"/>
+        </a:xfrm>
+      </p:grpSpPr>
+      <p:sp>
+        <p:nvSpPr>
+          <p:cNvPr id="3" name="Content Placeholder 2">
+            <a:extLst>
+              <a:ext uri="{FF2B5EF4-FFF2-40B4-BE49-F238E27FC236}">
+                <a16:creationId xmlns:a16="http://schemas.microsoft.com/office/drawing/2014/main" id="{9DCF4AFB-8C25-E06C-4F94-B4B573965867}"/>
+              </a:ext>
+            </a:extLst>
+          </p:cNvPr>
+          <p:cNvSpPr>
+            <a:spLocks noGrp="1"/>
+          </p:cNvSpPr>
+          <p:nvPr>
+            <p:ph idx="1"/>
+          </p:nvPr>
+        </p:nvSpPr>
+        <p:spPr>
+          <a:xfrm>
+            <a:off x="0" y="507978"/>
+            <a:ext cx="6704360" cy="10799763"/>
+          </a:xfrm>
+        </p:spPr>
+        <p:txBody>
+          <a:bodyPr>
+            <a:normAutofit/>
+          </a:bodyPr>
+          <a:lstStyle/>
+          <a:p>
+            <a:pPr marL="0" indent="0">
+              <a:buNone/>
+            </a:pPr>
+            <a:r>
+              <a:rPr lang="en-US" dirty="0"/>
+              <a:t>   </a:t>
+            </a:r>
+          </a:p>
+          <a:p>
+            <a:pPr marL="0" indent="0">
+              <a:buNone/>
+            </a:pPr>
+            <a:endParaRPr lang="en-US" dirty="0"/>
+          </a:p>
+          <a:p>
+            <a:pPr marL="0" indent="0">
+              <a:buNone/>
+            </a:pPr>
+            <a:endParaRPr lang="en-US" dirty="0"/>
+          </a:p>
+          <a:p>
+            <a:pPr marL="0" indent="0">
+              <a:buNone/>
+            </a:pPr>
+            <a:endParaRPr lang="en-US" dirty="0"/>
+          </a:p>
+          <a:p>
+            <a:pPr marL="0" indent="0">
+              <a:buNone/>
+            </a:pPr>
+            <a:endParaRPr lang="en-US" dirty="0"/>
+          </a:p>
+          <a:p>
+            <a:pPr marL="0" indent="0">
+              <a:buNone/>
+            </a:pPr>
+            <a:endParaRPr lang="en-US" dirty="0"/>
+          </a:p>
+          <a:p>
+            <a:pPr marL="0" indent="0">
+              <a:buNone/>
+            </a:pPr>
+            <a:endParaRPr lang="en-US" dirty="0"/>
+          </a:p>
+          <a:p>
+            <a:pPr marL="0" indent="0">
+              <a:buNone/>
+            </a:pPr>
+            <a:endParaRPr lang="en-US" dirty="0"/>
+          </a:p>
+          <a:p>
+            <a:pPr marL="0" indent="0">
+              <a:buNone/>
+            </a:pPr>
+            <a:endParaRPr lang="en-US" dirty="0"/>
+          </a:p>
+          <a:p>
+            <a:pPr marL="0" indent="0">
+              <a:buNone/>
+            </a:pPr>
+            <a:endParaRPr lang="en-US" dirty="0"/>
+          </a:p>
+          <a:p>
+            <a:pPr marL="0" indent="0">
+              <a:buNone/>
+            </a:pPr>
+            <a:endParaRPr lang="en-US" dirty="0"/>
+          </a:p>
+          <a:p>
+            <a:pPr marL="0" indent="0">
+              <a:buNone/>
+            </a:pPr>
+            <a:endParaRPr lang="en-US" dirty="0"/>
+          </a:p>
+          <a:p>
+            <a:pPr marL="0" indent="0">
+              <a:buNone/>
+            </a:pPr>
+            <a:endParaRPr lang="en-US" dirty="0"/>
+          </a:p>
+          <a:p>
+            <a:pPr marL="0" indent="0">
+              <a:buNone/>
+            </a:pPr>
+            <a:endParaRPr lang="en-US" dirty="0"/>
+          </a:p>
+          <a:p>
+            <a:pPr marL="0" indent="0">
+              <a:buNone/>
+            </a:pPr>
+            <a:endParaRPr lang="en-US" dirty="0"/>
+          </a:p>
+        </p:txBody>
+      </p:sp>
+      <p:pic>
+        <p:nvPicPr>
+          <p:cNvPr id="12" name="Picture 11">
+            <a:extLst>
+              <a:ext uri="{FF2B5EF4-FFF2-40B4-BE49-F238E27FC236}">
+                <a16:creationId xmlns:a16="http://schemas.microsoft.com/office/drawing/2014/main" id="{CA7548D6-3906-91D4-16F0-5144FA48C71D}"/>
+              </a:ext>
+            </a:extLst>
+          </p:cNvPr>
+          <p:cNvPicPr>
+            <a:picLocks noChangeAspect="1"/>
+          </p:cNvPicPr>
+          <p:nvPr/>
+        </p:nvPicPr>
+        <p:blipFill>
+          <a:blip r:embed="rId2"/>
+          <a:stretch>
+            <a:fillRect/>
+          </a:stretch>
+        </p:blipFill>
+        <p:spPr>
+          <a:xfrm>
+            <a:off x="121971" y="1219156"/>
+            <a:ext cx="6956957" cy="2042204"/>
+          </a:xfrm>
+          <a:prstGeom prst="rect">
+            <a:avLst/>
+          </a:prstGeom>
+        </p:spPr>
+      </p:pic>
+      <p:sp>
+        <p:nvSpPr>
+          <p:cNvPr id="5" name="TextBox 4">
+            <a:extLst>
+              <a:ext uri="{FF2B5EF4-FFF2-40B4-BE49-F238E27FC236}">
+                <a16:creationId xmlns:a16="http://schemas.microsoft.com/office/drawing/2014/main" id="{BA4ECEC9-DF90-F881-E090-36B266132807}"/>
+              </a:ext>
+            </a:extLst>
+          </p:cNvPr>
+          <p:cNvSpPr txBox="1"/>
+          <p:nvPr/>
+        </p:nvSpPr>
+        <p:spPr>
+          <a:xfrm>
+            <a:off x="0" y="660400"/>
+            <a:ext cx="6573520" cy="369332"/>
+          </a:xfrm>
+          <a:prstGeom prst="rect">
+            <a:avLst/>
+          </a:prstGeom>
+          <a:noFill/>
+        </p:spPr>
+        <p:txBody>
+          <a:bodyPr wrap="square" rtlCol="0">
+            <a:spAutoFit/>
+          </a:bodyPr>
+          <a:lstStyle/>
+          <a:p>
+            <a:r>
+              <a:rPr lang="en-US" dirty="0"/>
+              <a:t> ping from 172.16.55.1 to 192.168.11.11</a:t>
+            </a:r>
+            <a:endParaRPr lang="en-IN" dirty="0"/>
+          </a:p>
+        </p:txBody>
+      </p:sp>
+      <p:sp>
+        <p:nvSpPr>
+          <p:cNvPr id="6" name="TextBox 5">
+            <a:extLst>
+              <a:ext uri="{FF2B5EF4-FFF2-40B4-BE49-F238E27FC236}">
+                <a16:creationId xmlns:a16="http://schemas.microsoft.com/office/drawing/2014/main" id="{A30ADF37-0BC2-672D-77ED-BD00E9F15189}"/>
+              </a:ext>
+            </a:extLst>
+          </p:cNvPr>
+          <p:cNvSpPr txBox="1"/>
+          <p:nvPr/>
+        </p:nvSpPr>
+        <p:spPr>
+          <a:xfrm>
+            <a:off x="0" y="3531466"/>
+            <a:ext cx="6573520" cy="369332"/>
+          </a:xfrm>
+          <a:prstGeom prst="rect">
+            <a:avLst/>
+          </a:prstGeom>
+          <a:noFill/>
+        </p:spPr>
+        <p:txBody>
+          <a:bodyPr wrap="square" rtlCol="0">
+            <a:spAutoFit/>
+          </a:bodyPr>
+          <a:lstStyle/>
+          <a:p>
+            <a:r>
+              <a:rPr lang="en-US" dirty="0"/>
+              <a:t> ping from 172.16.22.1 to 192.168.11.11</a:t>
+            </a:r>
+            <a:endParaRPr lang="en-IN" dirty="0"/>
+          </a:p>
+        </p:txBody>
+      </p:sp>
+      <p:pic>
+        <p:nvPicPr>
+          <p:cNvPr id="8" name="Picture 7">
+            <a:extLst>
+              <a:ext uri="{FF2B5EF4-FFF2-40B4-BE49-F238E27FC236}">
+                <a16:creationId xmlns:a16="http://schemas.microsoft.com/office/drawing/2014/main" id="{A82C970A-89EE-2C73-D2D6-69577EE07658}"/>
+              </a:ext>
+            </a:extLst>
+          </p:cNvPr>
+          <p:cNvPicPr>
+            <a:picLocks noChangeAspect="1"/>
+          </p:cNvPicPr>
+          <p:nvPr/>
+        </p:nvPicPr>
+        <p:blipFill>
+          <a:blip r:embed="rId3"/>
+          <a:stretch>
+            <a:fillRect/>
+          </a:stretch>
+        </p:blipFill>
+        <p:spPr>
+          <a:xfrm>
+            <a:off x="121971" y="3914322"/>
+            <a:ext cx="6797040" cy="1637762"/>
+          </a:xfrm>
+          <a:prstGeom prst="rect">
+            <a:avLst/>
+          </a:prstGeom>
+        </p:spPr>
+      </p:pic>
+      <p:sp>
+        <p:nvSpPr>
+          <p:cNvPr id="2" name="Title 1">
+            <a:extLst>
+              <a:ext uri="{FF2B5EF4-FFF2-40B4-BE49-F238E27FC236}">
+                <a16:creationId xmlns:a16="http://schemas.microsoft.com/office/drawing/2014/main" id="{197C227A-9D5B-DCDC-6058-C3EA8277EFB2}"/>
+              </a:ext>
+            </a:extLst>
+          </p:cNvPr>
+          <p:cNvSpPr txBox="1">
+            <a:spLocks/>
+          </p:cNvSpPr>
+          <p:nvPr/>
+        </p:nvSpPr>
+        <p:spPr>
+          <a:xfrm>
+            <a:off x="-1" y="0"/>
+            <a:ext cx="7199313" cy="507978"/>
+          </a:xfrm>
+          <a:prstGeom prst="rect">
+            <a:avLst/>
+          </a:prstGeom>
+          <a:solidFill>
+            <a:schemeClr val="accent1"/>
+          </a:solidFill>
+        </p:spPr>
+        <p:txBody>
+          <a:bodyPr vert="horz" lIns="91440" tIns="45720" rIns="91440" bIns="45720" rtlCol="0" anchor="ctr">
+            <a:noAutofit/>
+          </a:bodyPr>
+          <a:lstStyle>
+            <a:lvl1pPr algn="l" defTabSz="719907" rtl="0" eaLnBrk="1" latinLnBrk="0" hangingPunct="1">
+              <a:lnSpc>
+                <a:spcPct val="90000"/>
+              </a:lnSpc>
+              <a:spcBef>
+                <a:spcPct val="0"/>
+              </a:spcBef>
+              <a:buNone/>
+              <a:defRPr sz="3464" kern="1200">
+                <a:solidFill>
+                  <a:schemeClr val="tx1"/>
+                </a:solidFill>
+                <a:latin typeface="+mj-lt"/>
+                <a:ea typeface="+mj-ea"/>
+                <a:cs typeface="+mj-cs"/>
+              </a:defRPr>
+            </a:lvl1pPr>
+          </a:lstStyle>
+          <a:p>
+            <a:pPr algn="ctr"/>
+            <a:r>
+              <a:rPr lang="en-US" sz="3600" b="1" dirty="0">
+                <a:solidFill>
+                  <a:schemeClr val="bg1"/>
+                </a:solidFill>
+              </a:rPr>
+              <a:t>PING</a:t>
+            </a:r>
+            <a:endParaRPr lang="en-IN" sz="3600" b="1" dirty="0">
+              <a:solidFill>
+                <a:schemeClr val="bg1"/>
+              </a:solidFill>
+            </a:endParaRPr>
+          </a:p>
+        </p:txBody>
+      </p:sp>
+    </p:spTree>
+    <p:extLst>
+      <p:ext uri="{BB962C8B-B14F-4D97-AF65-F5344CB8AC3E}">
+        <p14:creationId xmlns:p14="http://schemas.microsoft.com/office/powerpoint/2010/main" val="3617009528"/>
+      </p:ext>
+    </p:extLst>
+  </p:cSld>
+  <p:clrMapOvr>
+    <a:masterClrMapping/>
+  </p:clrMapOvr>
+</p:sld>
+</file>
+
+<file path=ppt/slides/slide7.xml><?xml version="1.0" encoding="utf-8"?>
+<p:sld xmlns:a="http://schemas.openxmlformats.org/drawingml/2006/main" xmlns:r="http://schemas.openxmlformats.org/officeDocument/2006/relationships" xmlns:p="http://schemas.openxmlformats.org/presentationml/2006/main">
+  <p:cSld>
+    <p:spTree>
+      <p:nvGrpSpPr>
         <p:cNvPr id="1" name=""/>
         <p:cNvGrpSpPr/>
         <p:nvPr/>
@@ -5701,10 +6891,19 @@
           </a:p>
           <a:p>
             <a:pPr algn="l"/>
+            <a:br>
+              <a:rPr lang="en-US" dirty="0"/>
+            </a:br>
+            <a:br>
+              <a:rPr lang="en-US" dirty="0"/>
+            </a:br>
             <a:r>
               <a:rPr lang="en-US" dirty="0"/>
               <a:t>2. MM_KEY_EXCH:</a:t>
             </a:r>
+          </a:p>
+          <a:p>
+            <a:pPr algn="l"/>
             <a:br>
               <a:rPr lang="en-US" dirty="0"/>
             </a:br>
@@ -5714,16 +6913,32 @@
             <a:pPr algn="l"/>
             <a:r>
               <a:rPr lang="en-US" dirty="0"/>
-              <a:t>   </a:t>
-            </a:r>
-          </a:p>
-          <a:p>
-            <a:pPr algn="l"/>
-            <a:endParaRPr lang="en-US" dirty="0"/>
-          </a:p>
-          <a:p>
-            <a:pPr algn="l"/>
-            <a:endParaRPr lang="en-US" dirty="0"/>
+              <a:t>                      (specific:   </a:t>
+            </a:r>
+            <a:r>
+              <a:rPr lang="en-US" dirty="0" err="1"/>
+              <a:t>fw</a:t>
+            </a:r>
+            <a:r>
+              <a:rPr lang="en-US" dirty="0"/>
+              <a:t> </a:t>
+            </a:r>
+            <a:r>
+              <a:rPr lang="en-US" dirty="0" err="1"/>
+              <a:t>ctl</a:t>
+            </a:r>
+            <a:r>
+              <a:rPr lang="en-US" dirty="0"/>
+              <a:t> </a:t>
+            </a:r>
+            <a:r>
+              <a:rPr lang="en-US" dirty="0" err="1"/>
+              <a:t>zdebug</a:t>
+            </a:r>
+            <a:r>
+              <a:rPr lang="en-US" dirty="0"/>
+              <a:t> drop + grep 100.1.1.9)</a:t>
+            </a:r>
           </a:p>
           <a:p>
             <a:pPr algn="l"/>
@@ -5883,38 +7098,8 @@
         </p:blipFill>
         <p:spPr>
           <a:xfrm>
-            <a:off x="369290" y="6730189"/>
+            <a:off x="369290" y="6826478"/>
             <a:ext cx="6596444" cy="493819"/>
-          </a:xfrm>
-          <a:prstGeom prst="rect">
-            <a:avLst/>
-          </a:prstGeom>
-        </p:spPr>
-      </p:pic>
-      <p:pic>
-        <p:nvPicPr>
-          <p:cNvPr id="53" name="Picture 52">
-            <a:extLst>
-              <a:ext uri="{FF2B5EF4-FFF2-40B4-BE49-F238E27FC236}">
-                <a16:creationId xmlns:a16="http://schemas.microsoft.com/office/drawing/2014/main" id="{C055AAD9-FFB9-8B76-65E6-C2842D41620C}"/>
-              </a:ext>
-            </a:extLst>
-          </p:cNvPr>
-          <p:cNvPicPr>
-            <a:picLocks noChangeAspect="1"/>
-          </p:cNvPicPr>
-          <p:nvPr/>
-        </p:nvPicPr>
-        <p:blipFill>
-          <a:blip r:embed="rId4"/>
-          <a:stretch>
-            <a:fillRect/>
-          </a:stretch>
-        </p:blipFill>
-        <p:spPr>
-          <a:xfrm>
-            <a:off x="505116" y="6225930"/>
-            <a:ext cx="5868219" cy="352474"/>
           </a:xfrm>
           <a:prstGeom prst="rect">
             <a:avLst/>
@@ -6041,6 +7226,36 @@
           </a:prstGeom>
         </p:spPr>
       </p:pic>
+      <p:pic>
+        <p:nvPicPr>
+          <p:cNvPr id="5" name="Picture 4">
+            <a:extLst>
+              <a:ext uri="{FF2B5EF4-FFF2-40B4-BE49-F238E27FC236}">
+                <a16:creationId xmlns:a16="http://schemas.microsoft.com/office/drawing/2014/main" id="{24E99D72-4A66-921F-A5C4-A382D0EE935F}"/>
+              </a:ext>
+            </a:extLst>
+          </p:cNvPr>
+          <p:cNvPicPr>
+            <a:picLocks noChangeAspect="1"/>
+          </p:cNvPicPr>
+          <p:nvPr/>
+        </p:nvPicPr>
+        <p:blipFill>
+          <a:blip r:embed="rId9"/>
+          <a:stretch>
+            <a:fillRect/>
+          </a:stretch>
+        </p:blipFill>
+        <p:spPr>
+          <a:xfrm>
+            <a:off x="302228" y="5851833"/>
+            <a:ext cx="6402479" cy="438193"/>
+          </a:xfrm>
+          <a:prstGeom prst="rect">
+            <a:avLst/>
+          </a:prstGeom>
+        </p:spPr>
+      </p:pic>
     </p:spTree>
     <p:extLst>
       <p:ext uri="{BB962C8B-B14F-4D97-AF65-F5344CB8AC3E}">
@@ -6054,7 +7269,7 @@
 </p:sld>
 </file>
 
-<file path=ppt/slides/slide7.xml><?xml version="1.0" encoding="utf-8"?>
+<file path=ppt/slides/slide8.xml><?xml version="1.0" encoding="utf-8"?>
 <p:sld xmlns:a="http://schemas.openxmlformats.org/drawingml/2006/main" xmlns:r="http://schemas.openxmlformats.org/officeDocument/2006/relationships" xmlns:p="http://schemas.openxmlformats.org/presentationml/2006/main">
   <p:cSld>
     <p:spTree>
@@ -6155,8 +7370,21 @@
             <a:pPr algn="l"/>
             <a:r>
               <a:rPr lang="en-US" sz="1800" dirty="0"/>
-              <a:t>4. No Crypto ACL or Encryption Domain other side</a:t>
-            </a:r>
+              <a:t>4. No crypto </a:t>
+            </a:r>
+            <a:r>
+              <a:rPr lang="en-US" sz="1800" dirty="0" err="1"/>
+              <a:t>acl</a:t>
+            </a:r>
+            <a:r>
+              <a:rPr lang="en-US" sz="1800" dirty="0"/>
+              <a:t> or Encryption Domain </a:t>
+            </a:r>
+            <a:r>
+              <a:rPr lang="en-US" sz="1800" dirty="0" err="1"/>
+              <a:t>otherside</a:t>
+            </a:r>
+            <a:endParaRPr lang="en-US" sz="1800" dirty="0"/>
           </a:p>
           <a:p>
             <a:pPr algn="l"/>
@@ -6542,7 +7770,7 @@
 </p:sld>
 </file>
 
-<file path=ppt/slides/slide8.xml><?xml version="1.0" encoding="utf-8"?>
+<file path=ppt/slides/slide9.xml><?xml version="1.0" encoding="utf-8"?>
 <p:sld xmlns:a="http://schemas.openxmlformats.org/drawingml/2006/main" xmlns:r="http://schemas.openxmlformats.org/officeDocument/2006/relationships" xmlns:p="http://schemas.openxmlformats.org/presentationml/2006/main">
   <p:cSld>
     <p:spTree>
@@ -6940,303 +8168,6 @@
     <p:extLst>
       <p:ext uri="{BB962C8B-B14F-4D97-AF65-F5344CB8AC3E}">
         <p14:creationId xmlns:p14="http://schemas.microsoft.com/office/powerpoint/2010/main" val="1254537525"/>
-      </p:ext>
-    </p:extLst>
-  </p:cSld>
-  <p:clrMapOvr>
-    <a:masterClrMapping/>
-  </p:clrMapOvr>
-</p:sld>
-</file>
-
-<file path=ppt/slides/slide9.xml><?xml version="1.0" encoding="utf-8"?>
-<p:sld xmlns:a="http://schemas.openxmlformats.org/drawingml/2006/main" xmlns:r="http://schemas.openxmlformats.org/officeDocument/2006/relationships" xmlns:p="http://schemas.openxmlformats.org/presentationml/2006/main">
-  <p:cSld>
-    <p:spTree>
-      <p:nvGrpSpPr>
-        <p:cNvPr id="1" name="">
-          <a:extLst>
-            <a:ext uri="{FF2B5EF4-FFF2-40B4-BE49-F238E27FC236}">
-              <a16:creationId xmlns:a16="http://schemas.microsoft.com/office/drawing/2014/main" id="{93639A97-2A5C-829A-8640-2C228062B7ED}"/>
-            </a:ext>
-          </a:extLst>
-        </p:cNvPr>
-        <p:cNvGrpSpPr/>
-        <p:nvPr/>
-      </p:nvGrpSpPr>
-      <p:grpSpPr>
-        <a:xfrm>
-          <a:off x="0" y="0"/>
-          <a:ext cx="0" cy="0"/>
-          <a:chOff x="0" y="0"/>
-          <a:chExt cx="0" cy="0"/>
-        </a:xfrm>
-      </p:grpSpPr>
-      <p:sp>
-        <p:nvSpPr>
-          <p:cNvPr id="2" name="Title 1">
-            <a:extLst>
-              <a:ext uri="{FF2B5EF4-FFF2-40B4-BE49-F238E27FC236}">
-                <a16:creationId xmlns:a16="http://schemas.microsoft.com/office/drawing/2014/main" id="{5475AC1A-5435-8715-558C-7037F123B49F}"/>
-              </a:ext>
-            </a:extLst>
-          </p:cNvPr>
-          <p:cNvSpPr>
-            <a:spLocks noGrp="1"/>
-          </p:cNvSpPr>
-          <p:nvPr>
-            <p:ph type="ctrTitle"/>
-          </p:nvPr>
-        </p:nvSpPr>
-        <p:spPr>
-          <a:xfrm>
-            <a:off x="-1" y="0"/>
-            <a:ext cx="7199313" cy="507978"/>
-          </a:xfrm>
-          <a:solidFill>
-            <a:schemeClr val="accent1"/>
-          </a:solidFill>
-        </p:spPr>
-        <p:txBody>
-          <a:bodyPr>
-            <a:noAutofit/>
-          </a:bodyPr>
-          <a:lstStyle/>
-          <a:p>
-            <a:r>
-              <a:rPr lang="en-US" sz="2400" b="1" dirty="0">
-                <a:solidFill>
-                  <a:schemeClr val="bg1"/>
-                </a:solidFill>
-              </a:rPr>
-              <a:t>SITE-TO-SITE VPN (TROUBLESHOOT) On ASA</a:t>
-            </a:r>
-            <a:endParaRPr lang="en-IN" sz="2400" b="1" dirty="0">
-              <a:solidFill>
-                <a:schemeClr val="bg1"/>
-              </a:solidFill>
-            </a:endParaRPr>
-          </a:p>
-        </p:txBody>
-      </p:sp>
-      <p:sp>
-        <p:nvSpPr>
-          <p:cNvPr id="3" name="Subtitle 2">
-            <a:extLst>
-              <a:ext uri="{FF2B5EF4-FFF2-40B4-BE49-F238E27FC236}">
-                <a16:creationId xmlns:a16="http://schemas.microsoft.com/office/drawing/2014/main" id="{75F8F4AF-69AF-4AA9-ED71-2C3CAE6AC3B1}"/>
-              </a:ext>
-            </a:extLst>
-          </p:cNvPr>
-          <p:cNvSpPr>
-            <a:spLocks noGrp="1"/>
-          </p:cNvSpPr>
-          <p:nvPr>
-            <p:ph type="subTitle" idx="1"/>
-          </p:nvPr>
-        </p:nvSpPr>
-        <p:spPr>
-          <a:xfrm>
-            <a:off x="-1" y="589454"/>
-            <a:ext cx="7199313" cy="8410085"/>
-          </a:xfrm>
-        </p:spPr>
-        <p:txBody>
-          <a:bodyPr>
-            <a:normAutofit/>
-          </a:bodyPr>
-          <a:lstStyle/>
-          <a:p>
-            <a:pPr algn="l"/>
-            <a:r>
-              <a:rPr lang="en-US" dirty="0"/>
-              <a:t>4. Both phases success: </a:t>
-            </a:r>
-            <a:br>
-              <a:rPr lang="en-US" dirty="0"/>
-            </a:br>
-            <a:r>
-              <a:rPr lang="en-US" dirty="0"/>
-              <a:t>  </a:t>
-            </a:r>
-          </a:p>
-          <a:p>
-            <a:pPr algn="l"/>
-            <a:endParaRPr lang="en-US" dirty="0"/>
-          </a:p>
-          <a:p>
-            <a:pPr algn="l"/>
-            <a:endParaRPr lang="en-US" dirty="0"/>
-          </a:p>
-          <a:p>
-            <a:pPr algn="l"/>
-            <a:endParaRPr lang="en-US" dirty="0"/>
-          </a:p>
-          <a:p>
-            <a:pPr algn="l"/>
-            <a:endParaRPr lang="en-US" dirty="0"/>
-          </a:p>
-          <a:p>
-            <a:pPr algn="l"/>
-            <a:endParaRPr lang="en-US" dirty="0"/>
-          </a:p>
-          <a:p>
-            <a:pPr algn="l"/>
-            <a:endParaRPr lang="en-US" dirty="0"/>
-          </a:p>
-          <a:p>
-            <a:pPr algn="l"/>
-            <a:endParaRPr lang="en-US" dirty="0"/>
-          </a:p>
-          <a:p>
-            <a:pPr algn="l"/>
-            <a:endParaRPr lang="en-US" dirty="0"/>
-          </a:p>
-          <a:p>
-            <a:pPr algn="l"/>
-            <a:endParaRPr lang="en-US" dirty="0"/>
-          </a:p>
-          <a:p>
-            <a:pPr algn="l"/>
-            <a:endParaRPr lang="en-US" dirty="0"/>
-          </a:p>
-          <a:p>
-            <a:pPr algn="l"/>
-            <a:r>
-              <a:rPr lang="en-US" dirty="0"/>
-              <a:t>   </a:t>
-            </a:r>
-          </a:p>
-          <a:p>
-            <a:pPr algn="l"/>
-            <a:endParaRPr lang="en-US" dirty="0"/>
-          </a:p>
-          <a:p>
-            <a:pPr algn="l"/>
-            <a:br>
-              <a:rPr lang="en-US" dirty="0"/>
-            </a:br>
-            <a:br>
-              <a:rPr lang="en-US" dirty="0"/>
-            </a:br>
-            <a:endParaRPr lang="en-US" dirty="0"/>
-          </a:p>
-          <a:p>
-            <a:pPr algn="l"/>
-            <a:endParaRPr lang="en-US" dirty="0"/>
-          </a:p>
-          <a:p>
-            <a:pPr algn="l"/>
-            <a:endParaRPr lang="en-US" dirty="0"/>
-          </a:p>
-          <a:p>
-            <a:pPr algn="l"/>
-            <a:endParaRPr lang="en-US" dirty="0"/>
-          </a:p>
-          <a:p>
-            <a:pPr algn="l"/>
-            <a:endParaRPr lang="en-US" dirty="0"/>
-          </a:p>
-          <a:p>
-            <a:pPr algn="l"/>
-            <a:endParaRPr lang="en-US" dirty="0"/>
-          </a:p>
-        </p:txBody>
-      </p:sp>
-      <p:pic>
-        <p:nvPicPr>
-          <p:cNvPr id="10" name="Picture 9">
-            <a:extLst>
-              <a:ext uri="{FF2B5EF4-FFF2-40B4-BE49-F238E27FC236}">
-                <a16:creationId xmlns:a16="http://schemas.microsoft.com/office/drawing/2014/main" id="{EB4B197A-9A68-3396-E0C3-F2E3AB05E480}"/>
-              </a:ext>
-            </a:extLst>
-          </p:cNvPr>
-          <p:cNvPicPr>
-            <a:picLocks noChangeAspect="1"/>
-          </p:cNvPicPr>
-          <p:nvPr/>
-        </p:nvPicPr>
-        <p:blipFill>
-          <a:blip r:embed="rId2"/>
-          <a:stretch>
-            <a:fillRect/>
-          </a:stretch>
-        </p:blipFill>
-        <p:spPr>
-          <a:xfrm>
-            <a:off x="308324" y="907082"/>
-            <a:ext cx="6584251" cy="1786283"/>
-          </a:xfrm>
-          <a:prstGeom prst="rect">
-            <a:avLst/>
-          </a:prstGeom>
-        </p:spPr>
-      </p:pic>
-      <p:pic>
-        <p:nvPicPr>
-          <p:cNvPr id="12" name="Picture 11">
-            <a:extLst>
-              <a:ext uri="{FF2B5EF4-FFF2-40B4-BE49-F238E27FC236}">
-                <a16:creationId xmlns:a16="http://schemas.microsoft.com/office/drawing/2014/main" id="{5587C10D-10BD-4AEB-D187-86CC2F55FAE9}"/>
-              </a:ext>
-            </a:extLst>
-          </p:cNvPr>
-          <p:cNvPicPr>
-            <a:picLocks noChangeAspect="1"/>
-          </p:cNvPicPr>
-          <p:nvPr/>
-        </p:nvPicPr>
-        <p:blipFill>
-          <a:blip r:embed="rId3"/>
-          <a:stretch>
-            <a:fillRect/>
-          </a:stretch>
-        </p:blipFill>
-        <p:spPr>
-          <a:xfrm>
-            <a:off x="308324" y="3424616"/>
-            <a:ext cx="6584251" cy="4461546"/>
-          </a:xfrm>
-          <a:prstGeom prst="rect">
-            <a:avLst/>
-          </a:prstGeom>
-        </p:spPr>
-      </p:pic>
-      <p:pic>
-        <p:nvPicPr>
-          <p:cNvPr id="14" name="Picture 13">
-            <a:extLst>
-              <a:ext uri="{FF2B5EF4-FFF2-40B4-BE49-F238E27FC236}">
-                <a16:creationId xmlns:a16="http://schemas.microsoft.com/office/drawing/2014/main" id="{5F48BF98-00E7-7EA8-73AD-92ED8B58C611}"/>
-              </a:ext>
-            </a:extLst>
-          </p:cNvPr>
-          <p:cNvPicPr>
-            <a:picLocks noChangeAspect="1"/>
-          </p:cNvPicPr>
-          <p:nvPr/>
-        </p:nvPicPr>
-        <p:blipFill>
-          <a:blip r:embed="rId4"/>
-          <a:stretch>
-            <a:fillRect/>
-          </a:stretch>
-        </p:blipFill>
-        <p:spPr>
-          <a:xfrm>
-            <a:off x="306738" y="2827191"/>
-            <a:ext cx="6584251" cy="597425"/>
-          </a:xfrm>
-          <a:prstGeom prst="rect">
-            <a:avLst/>
-          </a:prstGeom>
-        </p:spPr>
-      </p:pic>
-    </p:spTree>
-    <p:extLst>
-      <p:ext uri="{BB962C8B-B14F-4D97-AF65-F5344CB8AC3E}">
-        <p14:creationId xmlns:p14="http://schemas.microsoft.com/office/powerpoint/2010/main" val="2007425565"/>
       </p:ext>
     </p:extLst>
   </p:cSld>
